--- a/8/課題４.pptx
+++ b/8/課題４.pptx
@@ -105,6 +105,11 @@
       </a:defRPr>
     </a:lvl9pPr>
   </p:defaultTextStyle>
+  <p:extLst>
+    <p:ext uri="{EFAFB233-063F-42B5-8137-9DF3F51BA10A}">
+      <p15:sldGuideLst xmlns:p15="http://schemas.microsoft.com/office/powerpoint/2012/main"/>
+    </p:ext>
+  </p:extLst>
 </p:presentation>
 </file>
 
@@ -5291,7 +5296,7 @@
     </p:spTree>
     <p:extLst>
       <p:ext uri="{BB962C8B-B14F-4D97-AF65-F5344CB8AC3E}">
-        <p14:creationId xmlns:p14="http://schemas.microsoft.com/office/powerpoint/2010/main" val="1336031448"/>
+        <p14:creationId xmlns:p14="http://schemas.microsoft.com/office/powerpoint/2010/main" val="4067493812"/>
       </p:ext>
     </p:extLst>
   </p:cSld>
